--- a/output/SS_Generic_Electronics.pptx
+++ b/output/SS_Generic_Electronics.pptx
@@ -5714,7 +5714,7 @@
                 <a:cs typeface="Inter"/>
                 <a:sym typeface="Inter"/>
               </a:rPr>
-              <a:t>Natural-language queries like “its too hot in my room but i cant afford an ac what are my options” resolve to budget coolers and fans instead of ₹58,990 split ACs.</a:t>
+              <a:t>Natural-language queries like “its too hot in my room but i cant afford an ac what are my options” resolve to budget coolers and fans instead of expensive split ACs.</a:t>
             </a:r>
             <a:endParaRPr sz="1300">
               <a:solidFill>
@@ -9887,7 +9887,7 @@
                           <a:cs typeface="Inter"/>
                           <a:sym typeface="Inter"/>
                         </a:rPr>
-                        <a:t>inverter, 1.5 ton, 5 star, copper coil, split ac under 45k</a:t>
+                        <a:t>inverter, 1.5 ton, 5 star, copper coil, split ac, within budget</a:t>
                       </a:r>
                       <a:endParaRPr sz="1000" u="none" cap="none" strike="noStrike">
                         <a:latin typeface="Inter"/>
@@ -13768,7 +13768,7 @@
                 <a:cs typeface="Inter"/>
                 <a:sym typeface="Inter"/>
               </a:rPr>
-              <a:t>What an AI Shopping Assistant changes :  “I need a laptop under 60000 with Intel i5, 16GB RAM and SSD for college coding and light gaming”</a:t>
+              <a:t>What an AI Shopping Assistant changes :  “I need a laptop with Intel i5, 16GB RAM and SSD for college coding and light gaming, within budget”</a:t>
             </a:r>
             <a:endParaRPr b="0" i="0" sz="1100" u="none" cap="none" strike="noStrike">
               <a:solidFill>
@@ -14400,7 +14400,7 @@
                 <a:cs typeface="Inter"/>
                 <a:sym typeface="Inter"/>
               </a:rPr>
-              <a:t>Catalogs today don't expose attributes such as processor/energy-rating and tags such as “inverter” or “copper coil” which an AI agent needs to map intent such as “laptop for a college coder”  to “i5 16GB SSD under 60k” or “for a small bedroom” to “5-star copper-coil inverter AC”.</a:t>
+              <a:t>Catalogs today don't expose attributes such as processor/energy-rating and tags such as “inverter” or “copper coil” which an AI agent needs to map intent such as “laptop for a college coder”  to “i5 16GB SSD within budget” or “for a small bedroom” to “5-star copper-coil inverter AC”.</a:t>
             </a:r>
             <a:endParaRPr b="0" i="0" sz="1200" u="none" cap="none" strike="noStrike">
               <a:solidFill>
@@ -14657,7 +14657,7 @@
                 <a:cs typeface="Inter"/>
                 <a:sym typeface="Inter"/>
               </a:rPr>
-              <a:t>Unlike traditional search bars that only cater to keyword matching for direct queries like “smart TV 55 inch 4K” or “16GB RAM”, AI chat assistants need to answer intent based queries like “I want appliances for my new flat” or “I want a laptop good for Photoshop and light gaming”. They have to map buyer intent to keywords using a knowledge graph and then search the catalog for relevant products using keywords, refer to the diagram in the next slide for an example</a:t>
+              <a:t>Unlike traditional search bars that only cater to keyword matching for direct queries like “smart TV 55 inch 4K” or “16GB RAM”, AI chat assistants need to answer intent based queries like “I want appliances for my new flat” or “I want a laptop good for Photoshop and light gaming”. They have to map buyer intent to keywords using a knowledge graph and then search the catalog for relevant products using keywords, refer to the diagram on slide 11 for an example</a:t>
             </a:r>
             <a:endParaRPr b="0" i="0" sz="1200" u="none" cap="none" strike="noStrike">
               <a:solidFill>

--- a/output/SS_Generic_Electronics.pptx
+++ b/output/SS_Generic_Electronics.pptx
@@ -13935,16 +13935,17 @@
       </p:sp>
       <p:pic>
         <p:nvPicPr>
-          <p:cNvPr id="59" name="Google Shape;59;p4" title="Screenshot 2026-04-14 at 9.08.05 PM.png"/>
-          <p:cNvPicPr preferRelativeResize="0"/>
+          <p:cNvPr id="59" name="Picture 58" descr="electronics_table.png"/>
+          <p:cNvPicPr>
+            <a:picLocks noChangeAspect="1"/>
+          </p:cNvPicPr>
           <p:nvPr/>
         </p:nvPicPr>
-        <p:blipFill rotWithShape="1">
-          <a:blip r:embed="rId3">
-            <a:alphaModFix/>
-          </a:blip>
-          <a:srcRect b="0" l="0" r="0" t="0"/>
-          <a:stretch/>
+        <p:blipFill>
+          <a:blip r:embed="rId4"/>
+          <a:stretch>
+            <a:fillRect/>
+          </a:stretch>
         </p:blipFill>
         <p:spPr>
           <a:xfrm>
@@ -13954,10 +13955,6 @@
           <a:prstGeom prst="rect">
             <a:avLst/>
           </a:prstGeom>
-          <a:noFill/>
-          <a:ln>
-            <a:noFill/>
-          </a:ln>
         </p:spPr>
       </p:pic>
     </p:spTree>

--- a/output/SS_Generic_Electronics.pptx
+++ b/output/SS_Generic_Electronics.pptx
@@ -6259,7 +6259,7 @@
                 <a:cs typeface="Inter"/>
                 <a:sym typeface="Inter"/>
               </a:rPr>
-              <a:t>An AI shopping assistant doesn't just search — it sells</a:t>
+              <a:t>Your AI sales associate doesn't just search — it sells</a:t>
             </a:r>
             <a:endParaRPr b="0" i="0" sz="2300" u="none" cap="none" strike="noStrike">
               <a:solidFill>
@@ -6450,7 +6450,7 @@
                 <a:cs typeface="Inter"/>
                 <a:sym typeface="Inter"/>
               </a:rPr>
-              <a:t>Clarifies intent instead of dumping a catalog — asks the right follow-up questions (occasion, budget, use-case, size/fit) before suggesting anything.</a:t>
+              <a:t>Like your best sales associate, it clarifies intent instead of dumping a catalog — asks the right follow-up questions (occasion, budget, use-case, size/fit) before suggesting anything.</a:t>
             </a:r>
             <a:endParaRPr b="0" i="0" sz="1100" u="none" cap="none" strike="noStrike">
               <a:solidFill>
@@ -13768,7 +13768,7 @@
                 <a:cs typeface="Inter"/>
                 <a:sym typeface="Inter"/>
               </a:rPr>
-              <a:t>What an AI Shopping Assistant changes :  “I need a laptop with Intel i5, 16GB RAM and SSD for college coding and light gaming, within budget”</a:t>
+              <a:t>What an AI Sales Associate changes :  “I need a laptop with Intel i5, 16GB RAM and SSD for college coding and light gaming, within budget”</a:t>
             </a:r>
             <a:endParaRPr b="0" i="0" sz="1100" u="none" cap="none" strike="noStrike">
               <a:solidFill>
@@ -13808,7 +13808,7 @@
                 <a:cs typeface="Inter"/>
                 <a:sym typeface="Inter"/>
               </a:rPr>
-              <a:t>An AI shopping assistant powered by a knowledge graph understands intent + constraints + context, it maps college coding to: Intel i5 / 16GB RAM / SSD / integrated GPU, adds the conditions for price and returns relevant products from the catalog - exactly what the shopper means and wants, not just what they typed.</a:t>
+              <a:t>An AI sales associate powered by a knowledge graph understands intent + constraints + context, it maps college coding to: Intel i5 / 16GB RAM / SSD / integrated GPU, adds the conditions for price and returns relevant products from the catalog - exactly what the shopper means and wants, not just what they typed.</a:t>
             </a:r>
             <a:endParaRPr b="0" i="0" sz="1100" u="none" cap="none" strike="noStrike">
               <a:solidFill>
@@ -15986,7 +15986,7 @@
                 <a:cs typeface="Inter"/>
                 <a:sym typeface="Inter"/>
               </a:rPr>
-              <a:t>AI Shopping Assistant on Website that can understand user intent</a:t>
+              <a:t>AI Sales Associate on your website that guides buyers to the right purchase</a:t>
             </a:r>
             <a:endParaRPr b="0" i="0" sz="1600" u="none" cap="none" strike="noStrike">
               <a:solidFill>
@@ -16052,7 +16052,7 @@
                 <a:cs typeface="Inter"/>
                 <a:sym typeface="Inter"/>
               </a:rPr>
-              <a:t>Chat-based shopping: voice, image, and text input</a:t>
+              <a:t>Acts as a digital sales associate — asks the right questions, understands what the buyer actually needs, and guides them to the right product</a:t>
             </a:r>
             <a:endParaRPr b="0" i="0" sz="1300" u="none" cap="none" strike="noStrike">
               <a:solidFill>
@@ -16092,7 +16092,7 @@
                 <a:cs typeface="Inter"/>
                 <a:sym typeface="Inter"/>
               </a:rPr>
-              <a:t>Lower cost per query - Graph handles 90%+ of queries, LLM tokens only for edge cases</a:t>
+              <a:t>Drives revenue, not just answers — every conversation is a guided selling opportunity that converts browsers into buyers</a:t>
             </a:r>
             <a:endParaRPr b="0" i="0" sz="1300" u="none" cap="none" strike="noStrike">
               <a:solidFill>
@@ -16132,7 +16132,7 @@
                 <a:cs typeface="Inter"/>
                 <a:sym typeface="Inter"/>
               </a:rPr>
-              <a:t>All intent based queries such as “appliances for a new flat”, “quiet washing machine that fits my bathroom” handled just like in ChatGPT and Amazon Rufus, giving buyer a full conversational experience.</a:t>
+              <a:t>All intent based queries such as “appliances for a new flat”, “quiet washing machine that fits my bathroom” handled just like in ChatGPT and Amazon Rufus, guiding buyers to a purchase just like your best in-store sales associate would.</a:t>
             </a:r>
             <a:endParaRPr b="0" i="0" sz="1300" u="none" cap="none" strike="noStrike">
               <a:solidFill>

--- a/output/SS_Generic_Electronics.pptx
+++ b/output/SS_Generic_Electronics.pptx
@@ -4875,7 +4875,7 @@
                 <a:cs typeface="Inter"/>
                 <a:sym typeface="Inter"/>
               </a:rPr>
-              <a:t>Conversational AI shopping assistants for for e-commerce websites</a:t>
+              <a:t>Conversational AI shopping assistants for e-commerce websites</a:t>
             </a:r>
             <a:endParaRPr b="0" i="0" sz="1600" u="none" cap="none" strike="noStrike">
               <a:solidFill>
@@ -5371,7 +5371,7 @@
                 <a:cs typeface="Inter"/>
                 <a:sym typeface="Inter"/>
               </a:rPr>
-              <a:t>Virtual Try On / Room Fit</a:t>
+              <a:t>AR Room Visualization</a:t>
             </a:r>
             <a:endParaRPr b="0" i="0" sz="1600" u="none" cap="none" strike="noStrike">
               <a:solidFill>
@@ -6450,7 +6450,7 @@
                 <a:cs typeface="Inter"/>
                 <a:sym typeface="Inter"/>
               </a:rPr>
-              <a:t>Like your best sales associate, it clarifies intent instead of dumping a catalog — asks the right follow-up questions (occasion, budget, use-case, size/fit) before suggesting anything.</a:t>
+              <a:t>Like your best sales associate, it clarifies intent instead of dumping a catalog — asks the right follow-up questions (occasion, budget, use-case, specs/compatibility) before suggesting anything.</a:t>
             </a:r>
             <a:endParaRPr b="0" i="0" sz="1100" u="none" cap="none" strike="noStrike">
               <a:solidFill>
@@ -6655,7 +6655,7 @@
                 <a:cs typeface="Inter"/>
                 <a:sym typeface="Inter"/>
               </a:rPr>
-              <a:t>Stylist-grade cross-sell → AOV lift</a:t>
+              <a:t>Expert-grade bundling → AOV lift</a:t>
             </a:r>
             <a:endParaRPr b="0" i="0" u="none" cap="none" strike="noStrike">
               <a:solidFill>
@@ -10467,7 +10467,7 @@
                 <a:cs typeface="Inter"/>
                 <a:sym typeface="Inter"/>
               </a:rPr>
-              <a:t>We can run a full 500-query audit on your site in under a week and show you exactly where you are losing crores in revenue..</a:t>
+              <a:t>We can run a full 500-query audit on your site in under a week and show you exactly where you are losing crores in revenue.</a:t>
             </a:r>
             <a:endParaRPr b="0" i="0" sz="1500" u="none" cap="none" strike="noStrike">
               <a:solidFill>
@@ -16773,7 +16773,7 @@
             </a:pPr>
             <a:r>
               <a:rPr b="1" lang="en-US" sz="2000"/>
-              <a:t>The future of e-commerce - shopping assistants, virtual try-on, multilingual queries and discovery through apps on LLM platforms.</a:t>
+              <a:t>The future of e-commerce - shopping assistants, AR room visualization, multilingual queries and discovery through apps on LLM platforms.</a:t>
             </a:r>
             <a:endParaRPr b="1" sz="2000"/>
           </a:p>
@@ -16815,15 +16815,7 @@
             </a:pPr>
             <a:r>
               <a:rPr lang="en-US"/>
-              <a:t xml:space="preserve">Buyers today are increasingly looking for virtual try-on to make more informed </a:t>
-            </a:r>
-            <a:r>
-              <a:rPr lang="en-US"/>
-              <a:t>decisions</a:t>
-            </a:r>
-            <a:r>
-              <a:rPr lang="en-US"/>
-              <a:t>.</a:t>
+              <a:t xml:space="preserve">Buyers today are increasingly looking for AR room visualization to make more informed decisions.</a:t>
             </a:r>
             <a:endParaRPr/>
           </a:p>

--- a/output/SS_Generic_Electronics.pptx
+++ b/output/SS_Generic_Electronics.pptx
@@ -6530,7 +6530,7 @@
                 <a:cs typeface="Inter"/>
                 <a:sym typeface="Inter"/>
               </a:rPr>
-              <a:t>Zalando's AI assistant rollout tied to 18% YoY profitability lift — proof the impact shows up in the P&amp;L.</a:t>
+              <a:t>Best Buy’s GenAI assistant drove agentic AI expansion across the storefront — proof the impact shows up in the P&amp;L.</a:t>
             </a:r>
             <a:endParaRPr b="0" i="0" sz="1100" u="none" cap="none" strike="noStrike">
               <a:solidFill>
@@ -7072,7 +7072,7 @@
                 <a:cs typeface="Inter"/>
                 <a:sym typeface="Inter"/>
               </a:rPr>
-              <a:t>Myntra's MyFashionGPT: users 3x more likely to purchase through the assistant than through keyword search.</a:t>
+              <a:t>Amazon Rufus: shoppers 60% more likely to complete a purchase through the assistant than through keyword search.</a:t>
             </a:r>
             <a:endParaRPr b="0" i="0" sz="1100" u="none" cap="none" strike="noStrike">
               <a:solidFill>
@@ -13302,7 +13302,7 @@
                 <a:cs typeface="Inter"/>
                 <a:sym typeface="Inter"/>
               </a:rPr>
-              <a:t xml:space="preserve">The current search bar on your e-commerce website needs the right keywords. It does not understand human language, it cannot match phone and smartphone, it cannot link “humid Bengaluru summer” to low-noise and low-noise to inverter.</a:t>
+              <a:t xml:space="preserve">The current search bar on your e-commerce website needs the right keywords. It does not understand human language, it cannot match phone and smartphone, it cannot link “hot summer in Chennai” to cooling and cooling to energy-efficient inverter AC.</a:t>
             </a:r>
             <a:endParaRPr b="0" i="0" sz="1100" u="none" cap="none" strike="noStrike">
               <a:solidFill>
@@ -13373,7 +13373,7 @@
                 <a:cs typeface="Inter"/>
                 <a:sym typeface="Inter"/>
               </a:rPr>
-              <a:t xml:space="preserve">But shoppers today do not shop using keywords such as “laptop for coding” or “5-star 1.5 ton inverter AC”, they shop by intents such as “for a small 10x12 bedroom” or “that doesn’t spike my summer bill”.  </a:t>
+              <a:t xml:space="preserve">But shoppers today do not shop using keywords such as “split AC” or “gaming laptop”, they shop by intents such as “for a small 10x12 bedroom” or “that won’t spike my electricity bill”.  </a:t>
             </a:r>
             <a:endParaRPr b="0" i="0" sz="1100" u="none" cap="none" strike="noStrike">
               <a:solidFill>
@@ -13808,7 +13808,7 @@
                 <a:cs typeface="Inter"/>
                 <a:sym typeface="Inter"/>
               </a:rPr>
-              <a:t>An AI sales associate powered by a knowledge graph understands intent + constraints + context, it maps college coding to: Intel i5 / 16GB RAM / SSD / integrated GPU, adds the conditions for price and returns relevant products from the catalog - exactly what the shopper means and wants, not just what they typed.</a:t>
+              <a:t>An AI sales associate powered by a knowledge graph understands intent + constraints + context, it maps college coding to: Intel i5 / 16GB RAM / SSD / dedicated GPU, adds the conditions for budget and returns relevant products from the catalog - exactly what the shopper means and wants, not just what they typed.</a:t>
             </a:r>
             <a:endParaRPr b="0" i="0" sz="1100" u="none" cap="none" strike="noStrike">
               <a:solidFill>
@@ -14397,7 +14397,7 @@
                 <a:cs typeface="Inter"/>
                 <a:sym typeface="Inter"/>
               </a:rPr>
-              <a:t>Catalogs today don't expose attributes such as processor/energy-rating and tags such as “inverter” or “copper coil” which an AI agent needs to map intent such as “laptop for a college coder”  to “i5 16GB SSD within budget” or “for a small bedroom” to “5-star copper-coil inverter AC”.</a:t>
+              <a:t>Catalogs today don't expose attributes such as processor/energy-rating and tags such as “inverter” or “copper coil” which an AI agent needs to map intent such as “laptop for a college coder”  to “i5 16GB SSD laptop” or “for a small bedroom” to “5-star copper-coil inverter AC”.</a:t>
             </a:r>
             <a:endParaRPr b="0" i="0" sz="1200" u="none" cap="none" strike="noStrike">
               <a:solidFill>
@@ -14654,7 +14654,7 @@
                 <a:cs typeface="Inter"/>
                 <a:sym typeface="Inter"/>
               </a:rPr>
-              <a:t>Unlike traditional search bars that only cater to keyword matching for direct queries like “smart TV 55 inch 4K” or “16GB RAM”, AI chat assistants need to answer intent based queries like “I want appliances for my new flat” or “I want a laptop good for Photoshop and light gaming”. They have to map buyer intent to keywords using a knowledge graph and then search the catalog for relevant products using keywords, refer to the diagram on slide 11 for an example</a:t>
+              <a:t>Unlike traditional search bars that only cater to keyword matching for direct queries like “smart TV 55 inch 4K” or “refrigerator”, AI chat assistants need to answer intent based queries like “I want appliances for my new flat” or “I want a laptop good for Photoshop and light gaming”. They have to map buyer intent to keywords using a knowledge graph and then search the catalog for relevant products using keywords, refer to the diagram on slide 11 for an example</a:t>
             </a:r>
             <a:endParaRPr b="0" i="0" sz="1200" u="none" cap="none" strike="noStrike">
               <a:solidFill>
@@ -16967,15 +16967,7 @@
             </a:pPr>
             <a:r>
               <a:rPr lang="en-US"/>
-              <a:t xml:space="preserve">As a result </a:t>
-            </a:r>
-            <a:r>
-              <a:rPr b="1" lang="en-US"/>
-              <a:t>Walmart, Sephora, Instacart, Doordash</a:t>
-            </a:r>
-            <a:r>
-              <a:rPr lang="en-US"/>
-              <a:t xml:space="preserve"> have already created apps on top of ChatGPT to capture buyers upfront.</a:t>
+              <a:t xml:space="preserve">As a result Walmart, Best Buy, Home Depot, Lowe’s have already created apps on top of ChatGPT to capture buyers upfront.</a:t>
             </a:r>
             <a:endParaRPr/>
           </a:p>
